--- a/dataset/guides_final/SW/manual/IT-SW-002-M_SW 라이선스 처리 매뉴얼.pptx
+++ b/dataset/guides_final/SW/manual/IT-SW-002-M_SW 라이선스 처리 매뉴얼.pptx
@@ -10368,7 +10368,7 @@
                 <a:ea typeface="Malgun Gothic"/>
                 <a:cs typeface="Malgun Gothic"/>
               </a:rPr>
-              <a:t>구매가 필요하면 구매 품의를 올리고 상태를 IP로 둔다.</a:t>
+              <a:t>구매가 필요하면 구매 품의를 올리고 상태를 WIP로 둔다.</a:t>
             </a:r>
           </a:p>
         </p:txBody>
@@ -26331,7 +26331,7 @@
                 <a:ea typeface="Malgun Gothic"/>
                 <a:cs typeface="Malgun Gothic"/>
               </a:rPr>
-              <a:t>티켓: 담당자 조치가 필요한 건. 담당 팀에 배정하고 상태를 RDY → IP → FIN → CLS 로 관리한다. FIN은 담당자 처리 완료, CLS는 문의자가 해결을 확인한 최종</a:t>
+              <a:t>티켓: 담당자 조치가 필요한 건. 담당 팀에 배정하고 상태를 RDY → WIP → FIN → CLS 로 관리한다. FIN은 담당자 처리 완료, CLS는 문의자가 해결을 확인한 최종</a:t>
             </a:r>
           </a:p>
           <a:p>

--- a/dataset/guides_final/SW/manual/IT-SW-002-M_SW 라이선스 처리 매뉴얼.pptx
+++ b/dataset/guides_final/SW/manual/IT-SW-002-M_SW 라이선스 처리 매뉴얼.pptx
@@ -3236,7 +3236,7 @@
                 <a:ea typeface="Malgun Gothic"/>
                 <a:cs typeface="Malgun Gothic"/>
               </a:rPr>
-              <a:t>한화시스템 ICT IT 담당자 매뉴얼 · SW·라이선스</a:t>
+              <a:t>가상 ICT 기업 IT 담당자 매뉴얼 · SW·라이선스</a:t>
             </a:r>
           </a:p>
         </p:txBody>
@@ -3515,7 +3515,7 @@
                 <a:ea typeface="Malgun Gothic"/>
                 <a:cs typeface="Malgun Gothic"/>
               </a:rPr>
-              <a:t>© HANWHA SYSTEMS ICT · IT-SW-002-M · 사내 제한</a:t>
+              <a:t>© 가상 ICT 기업 · IT-SW-002-M · 사내 제한</a:t>
             </a:r>
           </a:p>
         </p:txBody>
@@ -4440,7 +4440,7 @@
                 <a:ea typeface="Malgun Gothic"/>
                 <a:cs typeface="Malgun Gothic"/>
               </a:rPr>
-              <a:t>© HANWHA SYSTEMS ICT · IT-SW-002-M · 사내 제한</a:t>
+              <a:t>© 가상 ICT 기업 · IT-SW-002-M · 사내 제한</a:t>
             </a:r>
           </a:p>
         </p:txBody>
@@ -7114,7 +7114,7 @@
                 <a:ea typeface="Malgun Gothic"/>
                 <a:cs typeface="Malgun Gothic"/>
               </a:rPr>
-              <a:t>© HANWHA SYSTEMS ICT · IT-SW-002-M · 사내 제한</a:t>
+              <a:t>© 가상 ICT 기업 · IT-SW-002-M · 사내 제한</a:t>
             </a:r>
           </a:p>
         </p:txBody>
@@ -8039,7 +8039,7 @@
                 <a:ea typeface="Malgun Gothic"/>
                 <a:cs typeface="Malgun Gothic"/>
               </a:rPr>
-              <a:t>© HANWHA SYSTEMS ICT · IT-SW-002-M · 사내 제한</a:t>
+              <a:t>© 가상 ICT 기업 · IT-SW-002-M · 사내 제한</a:t>
             </a:r>
           </a:p>
         </p:txBody>
@@ -10783,7 +10783,7 @@
                 <a:ea typeface="Malgun Gothic"/>
                 <a:cs typeface="Malgun Gothic"/>
               </a:rPr>
-              <a:t>© HANWHA SYSTEMS ICT · IT-SW-002-M · 사내 제한</a:t>
+              <a:t>© 가상 ICT 기업 · IT-SW-002-M · 사내 제한</a:t>
             </a:r>
           </a:p>
         </p:txBody>
@@ -11708,7 +11708,7 @@
                 <a:ea typeface="Malgun Gothic"/>
                 <a:cs typeface="Malgun Gothic"/>
               </a:rPr>
-              <a:t>© HANWHA SYSTEMS ICT · IT-SW-002-M · 사내 제한</a:t>
+              <a:t>© 가상 ICT 기업 · IT-SW-002-M · 사내 제한</a:t>
             </a:r>
           </a:p>
         </p:txBody>
@@ -14264,7 +14264,7 @@
                 <a:ea typeface="Malgun Gothic"/>
                 <a:cs typeface="Malgun Gothic"/>
               </a:rPr>
-              <a:t>© HANWHA SYSTEMS ICT · IT-SW-002-M · 사내 제한</a:t>
+              <a:t>© 가상 ICT 기업 · IT-SW-002-M · 사내 제한</a:t>
             </a:r>
           </a:p>
         </p:txBody>
@@ -15189,7 +15189,7 @@
                 <a:ea typeface="Malgun Gothic"/>
                 <a:cs typeface="Malgun Gothic"/>
               </a:rPr>
-              <a:t>© HANWHA SYSTEMS ICT · IT-SW-002-M · 사내 제한</a:t>
+              <a:t>© 가상 ICT 기업 · IT-SW-002-M · 사내 제한</a:t>
             </a:r>
           </a:p>
         </p:txBody>
@@ -15437,7 +15437,7 @@
                 <a:ea typeface="Malgun Gothic"/>
                 <a:cs typeface="Malgun Gothic"/>
               </a:rPr>
-              <a:t>© HANWHA SYSTEMS ICT · IT-SW-002-M · 사내 제한</a:t>
+              <a:t>© 가상 ICT 기업 · IT-SW-002-M · 사내 제한</a:t>
             </a:r>
           </a:p>
         </p:txBody>
@@ -16120,7 +16120,7 @@
                 <a:ea typeface="Malgun Gothic"/>
                 <a:cs typeface="Malgun Gothic"/>
               </a:rPr>
-              <a:t>© HANWHA SYSTEMS ICT · IT-SW-002-M · 사내 제한</a:t>
+              <a:t>© 가상 ICT 기업 · IT-SW-002-M · 사내 제한</a:t>
             </a:r>
           </a:p>
         </p:txBody>
@@ -16368,7 +16368,7 @@
                 <a:ea typeface="Malgun Gothic"/>
                 <a:cs typeface="Malgun Gothic"/>
               </a:rPr>
-              <a:t>© HANWHA SYSTEMS ICT · IT-SW-002-M · 사내 제한</a:t>
+              <a:t>© 가상 ICT 기업 · IT-SW-002-M · 사내 제한</a:t>
             </a:r>
           </a:p>
         </p:txBody>
@@ -18011,7 +18011,7 @@
                 <a:ea typeface="Malgun Gothic"/>
                 <a:cs typeface="Malgun Gothic"/>
               </a:rPr>
-              <a:t>© HANWHA SYSTEMS ICT · IT-SW-002-M · 사내 제한</a:t>
+              <a:t>© 가상 ICT 기업 · IT-SW-002-M · 사내 제한</a:t>
             </a:r>
           </a:p>
         </p:txBody>
@@ -19039,7 +19039,7 @@
                 <a:ea typeface="Malgun Gothic"/>
                 <a:cs typeface="Malgun Gothic"/>
               </a:rPr>
-              <a:t>© HANWHA SYSTEMS ICT · IT-SW-002-M · 사내 제한</a:t>
+              <a:t>© 가상 ICT 기업 · IT-SW-002-M · 사내 제한</a:t>
             </a:r>
           </a:p>
         </p:txBody>
@@ -19287,7 +19287,7 @@
                 <a:ea typeface="Malgun Gothic"/>
                 <a:cs typeface="Malgun Gothic"/>
               </a:rPr>
-              <a:t>© HANWHA SYSTEMS ICT · IT-SW-002-M · 사내 제한</a:t>
+              <a:t>© 가상 ICT 기업 · IT-SW-002-M · 사내 제한</a:t>
             </a:r>
           </a:p>
         </p:txBody>
@@ -20599,7 +20599,7 @@
                 <a:ea typeface="Malgun Gothic"/>
                 <a:cs typeface="Malgun Gothic"/>
               </a:rPr>
-              <a:t>© HANWHA SYSTEMS ICT · IT-SW-002-M · 사내 제한</a:t>
+              <a:t>© 가상 ICT 기업 · IT-SW-002-M · 사내 제한</a:t>
             </a:r>
           </a:p>
         </p:txBody>
@@ -21307,7 +21307,7 @@
                 <a:ea typeface="Malgun Gothic"/>
                 <a:cs typeface="Malgun Gothic"/>
               </a:rPr>
-              <a:t>© HANWHA SYSTEMS ICT · IT-SW-002-M · 사내 제한</a:t>
+              <a:t>© 가상 ICT 기업 · IT-SW-002-M · 사내 제한</a:t>
             </a:r>
           </a:p>
         </p:txBody>
@@ -22453,7 +22453,7 @@
                 <a:ea typeface="Malgun Gothic"/>
                 <a:cs typeface="Malgun Gothic"/>
               </a:rPr>
-              <a:t>© HANWHA SYSTEMS ICT · IT-SW-002-M · 사내 제한</a:t>
+              <a:t>© 가상 ICT 기업 · IT-SW-002-M · 사내 제한</a:t>
             </a:r>
           </a:p>
         </p:txBody>
@@ -22701,7 +22701,7 @@
                 <a:ea typeface="Malgun Gothic"/>
                 <a:cs typeface="Malgun Gothic"/>
               </a:rPr>
-              <a:t>© HANWHA SYSTEMS ICT · IT-SW-002-M · 사내 제한</a:t>
+              <a:t>© 가상 ICT 기업 · IT-SW-002-M · 사내 제한</a:t>
             </a:r>
           </a:p>
         </p:txBody>
@@ -23599,7 +23599,7 @@
                 <a:ea typeface="Malgun Gothic"/>
                 <a:cs typeface="Malgun Gothic"/>
               </a:rPr>
-              <a:t>© HANWHA SYSTEMS ICT · IT-SW-002-M · 사내 제한</a:t>
+              <a:t>© 가상 ICT 기업 · IT-SW-002-M · 사내 제한</a:t>
             </a:r>
           </a:p>
         </p:txBody>
@@ -23847,7 +23847,7 @@
                 <a:ea typeface="Malgun Gothic"/>
                 <a:cs typeface="Malgun Gothic"/>
               </a:rPr>
-              <a:t>© HANWHA SYSTEMS ICT · IT-SW-002-M · 사내 제한</a:t>
+              <a:t>© 가상 ICT 기업 · IT-SW-002-M · 사내 제한</a:t>
             </a:r>
           </a:p>
         </p:txBody>
@@ -26731,7 +26731,7 @@
                 <a:ea typeface="Malgun Gothic"/>
                 <a:cs typeface="Malgun Gothic"/>
               </a:rPr>
-              <a:t>© HANWHA SYSTEMS ICT · IT-SW-002-M · 사내 제한</a:t>
+              <a:t>© 가상 ICT 기업 · IT-SW-002-M · 사내 제한</a:t>
             </a:r>
           </a:p>
         </p:txBody>
@@ -26979,7 +26979,7 @@
                 <a:ea typeface="Malgun Gothic"/>
                 <a:cs typeface="Malgun Gothic"/>
               </a:rPr>
-              <a:t>© HANWHA SYSTEMS ICT · IT-SW-002-M · 사내 제한</a:t>
+              <a:t>© 가상 ICT 기업 · IT-SW-002-M · 사내 제한</a:t>
             </a:r>
           </a:p>
         </p:txBody>
@@ -29793,7 +29793,7 @@
                 <a:ea typeface="Malgun Gothic"/>
                 <a:cs typeface="Malgun Gothic"/>
               </a:rPr>
-              <a:t>© HANWHA SYSTEMS ICT · IT-SW-002-M · 사내 제한</a:t>
+              <a:t>© 가상 ICT 기업 · IT-SW-002-M · 사내 제한</a:t>
             </a:r>
           </a:p>
         </p:txBody>
